--- a/public/fun/pack/pptx/reviewpro/보장점검양식프리미엄_07_부부점검_피치코퍼.pptx
+++ b/public/fun/pack/pptx/reviewpro/보장점검양식프리미엄_07_부부점검_피치코퍼.pptx
@@ -112,12 +112,12 @@
   <p:extLst>
     <p:ext uri="{521415D9-36F7-43E2-AB2F-B90AF26B5E84}">
       <p14:sectionLst xmlns:p14="http://schemas.microsoft.com/office/powerpoint/2010/main">
-        <p14:section name="시작" id="{9182A077-8855-4A58-ACBC-5D5B1EE981A5}">
+        <p14:section name="시작" id="{087865DD-BC0F-43CF-A33F-A8EED86F20CA}">
           <p14:sldIdLst>
             <p14:sldId id="256"/>
           </p14:sldIdLst>
         </p14:section>
-        <p14:section name="본문" id="{B7599C0F-2297-422B-BAB4-C92197DE036C}">
+        <p14:section name="본문" id="{5F82F18F-AEEE-4B5A-8503-A9E494BCA893}">
           <p14:sldIdLst>
             <p14:sldId id="257"/>
             <p14:sldId id="258"/>
@@ -1604,7 +1604,7 @@
             </a:lvl1pPr>
           </a:lstStyle>
           <a:p>
-            <a:fld id="{1ABB22C1-3A1A-4443-B3F9-109D0293170F}" type="slidenum">
+            <a:fld id="{DA4DF621-D689-4793-ACD5-75FB4BAADD63}" type="slidenum">
               <a:rPr lang="en-US"/>
               <a:t>‹#›</a:t>
             </a:fld>
@@ -2374,7 +2374,7 @@
             </a:lvl1pPr>
           </a:lstStyle>
           <a:p>
-            <a:fld id="{D14569C7-475D-449C-AE10-78510BBE8EFC}" type="slidenum">
+            <a:fld id="{C2976842-D588-44DB-967B-F6522FAC96D9}" type="slidenum">
               <a:rPr lang="en-US"/>
               <a:t>‹#›</a:t>
             </a:fld>
@@ -3123,7 +3123,7 @@
             </a:lvl1pPr>
           </a:lstStyle>
           <a:p>
-            <a:fld id="{9C5A96DE-F18A-4AFC-AAEB-9A2316AA8D44}" type="slidenum">
+            <a:fld id="{2A42C913-70F1-49D9-8C7D-1437856A6031}" type="slidenum">
               <a:rPr lang="en-US"/>
               <a:t>‹#›</a:t>
             </a:fld>
@@ -4008,7 +4008,7 @@
           <a:p>
             <a:r>
               <a:rPr lang="ko-KR"/>
-              <a:t>부부 점검 · 0000. 00. 00</a:t>
+              <a:t>부부 점검 · 날짜 입력</a:t>
             </a:r>
           </a:p>
           <a:p>
@@ -4121,7 +4121,7 @@
           <a:bodyPr/>
           <a:lstStyle/>
           <a:p>
-            <a:fld id="{823B8280-2417-43B9-AA50-BDF94EB8A2E9}" type="slidenum">
+            <a:fld id="{07CAFB9F-CF6C-4076-9A8E-1BD7695AD955}" type="slidenum">
               <a:rPr lang="en-US"/>
               <a:t>‹#›</a:t>
             </a:fld>
@@ -4856,7 +4856,7 @@
           <a:bodyPr/>
           <a:lstStyle/>
           <a:p>
-            <a:fld id="{28296E6B-282D-46C2-973B-8B217991DF0F}" type="slidenum">
+            <a:fld id="{1F644EE1-985E-498F-B12C-F62C4B57510B}" type="slidenum">
               <a:rPr lang="en-US"/>
               <a:t>‹#›</a:t>
             </a:fld>
@@ -6384,7 +6384,7 @@
           <a:bodyPr/>
           <a:lstStyle/>
           <a:p>
-            <a:fld id="{411B0AEE-3941-4D26-9D6F-631BB00BDA00}" type="slidenum">
+            <a:fld id="{408EC813-2F48-4218-BB24-2461946D2F35}" type="slidenum">
               <a:rPr lang="en-US"/>
               <a:t>‹#›</a:t>
             </a:fld>
@@ -7956,7 +7956,7 @@
           <a:bodyPr/>
           <a:lstStyle/>
           <a:p>
-            <a:fld id="{271D2D96-1656-43FF-8549-9337C092541D}" type="slidenum">
+            <a:fld id="{D8F032F2-E312-4543-BC49-E8EE21D754D0}" type="slidenum">
               <a:rPr lang="en-US"/>
               <a:t>‹#›</a:t>
             </a:fld>
@@ -8849,7 +8849,7 @@
           <a:bodyPr/>
           <a:lstStyle/>
           <a:p>
-            <a:fld id="{F39083E6-4B1A-499E-959F-8462798A76D5}" type="slidenum">
+            <a:fld id="{8C652EFC-546D-460C-87BA-926BD665BECA}" type="slidenum">
               <a:rPr lang="en-US"/>
               <a:t>‹#›</a:t>
             </a:fld>
